--- a/cursuri/02-explorare-vizualizare/curs-02-vizualizarea-datelor.pptx
+++ b/cursuri/02-explorare-vizualizare/curs-02-vizualizarea-datelor.pptx
@@ -12132,11 +12132,11 @@
             </a:pPr>
             <a:r>
               <a:rPr lang="en" dirty="0"/>
-              <a:t>ADS1 - Curs </a:t>
+              <a:t>SEED1 - Curs </a:t>
             </a:r>
             <a:r>
               <a:rPr lang="ro-RO" dirty="0"/>
-              <a:t>3</a:t>
+              <a:t>2</a:t>
             </a:r>
             <a:br>
               <a:rPr lang="en" dirty="0"/>
@@ -16418,7 +16418,7 @@
                       </a:pPr>
                       <a:r>
                         <a:rPr lang="en" sz="1000" dirty="0"/>
-                        <a:t>Media curenta - 0.005 =0.3120 sau 31.20</a:t>
+                        <a:t>Media curenta - 0.005 =0.3075 sau 30.75%</a:t>
                       </a:r>
                       <a:endParaRPr sz="1000" dirty="0"/>
                     </a:p>
